--- a/docs/presentation/ai-sdlc-bootstrap.pptx
+++ b/docs/presentation/ai-sdlc-bootstrap.pptx
@@ -2248,18 +2248,9 @@
                 <a:ea typeface="Lexend Deca" pitchFamily="34" charset="-122"/>
                 <a:cs typeface="Lexend Deca" pitchFamily="34" charset="-120"/>
               </a:rPr>
-              <a:t>AI as a governed collaborator</a:t>
-            </a:r>
-            <a:endParaRPr lang="en-US" sz="4600" dirty="0"/>
-          </a:p>
-          <a:p>
-            <a:pPr marL="0" indent="0">
-              <a:lnSpc>
-                <a:spcPct val="100000"/>
-              </a:lnSpc>
-              <a:buNone/>
-            </a:pPr>
-            <a:r>
+              <a:t>AI EXPRESS </a:t>
+            </a:r>
+            <a:br>
               <a:rPr lang="en-US" sz="4600" b="1" dirty="0">
                 <a:solidFill>
                   <a:srgbClr val="FFFFFF"/>
@@ -2268,7 +2259,17 @@
                 <a:ea typeface="Lexend Deca" pitchFamily="34" charset="-122"/>
                 <a:cs typeface="Lexend Deca" pitchFamily="34" charset="-120"/>
               </a:rPr>
-              <a:t>across the SDLC</a:t>
+            </a:br>
+            <a:r>
+              <a:rPr lang="en-US" sz="4600" b="1" dirty="0">
+                <a:solidFill>
+                  <a:srgbClr val="FFFFFF"/>
+                </a:solidFill>
+                <a:latin typeface="Lexend Deca" pitchFamily="34" charset="0"/>
+                <a:ea typeface="Lexend Deca" pitchFamily="34" charset="-122"/>
+                <a:cs typeface="Lexend Deca" pitchFamily="34" charset="-120"/>
+              </a:rPr>
+              <a:t>a Framework across the SDLC</a:t>
             </a:r>
             <a:endParaRPr lang="en-US" sz="4600" dirty="0"/>
           </a:p>
@@ -3434,7 +3435,7 @@
                 <a:ea typeface="Lexend Deca" pitchFamily="34" charset="-122"/>
                 <a:cs typeface="Lexend Deca" pitchFamily="34" charset="-120"/>
               </a:rPr>
-              <a:t>Is the AI spend worth another developer?</a:t>
+              <a:t>Is the AI spending worth another developer?</a:t>
             </a:r>
             <a:endParaRPr lang="en-US" sz="3100" dirty="0"/>
           </a:p>
@@ -3505,7 +3506,7 @@
                 <a:ea typeface="Lexend Deca" pitchFamily="34" charset="-122"/>
                 <a:cs typeface="Lexend Deca" pitchFamily="34" charset="-120"/>
               </a:rPr>
-              <a:t>“A human-day costs ~€500. If we add ~€500/day of AI spend, is the output worth two devs — more, less — and what's the ROI?”</a:t>
+              <a:t>“A human-day costs ~€500. If we add ~€500/day of AI spend, is the output worth 2PD — more, less — and what's the ROI?”</a:t>
             </a:r>
             <a:endParaRPr lang="en-US" sz="1900" dirty="0"/>
           </a:p>
@@ -3755,7 +3756,7 @@
                 <a:ea typeface="Roboto" pitchFamily="34" charset="-122"/>
                 <a:cs typeface="Roboto" pitchFamily="34" charset="-120"/>
               </a:rPr>
-              <a:t>Claude Code sessions (per-token), Anthropic API, Cursor/Copilot (invoice), Max seats (flat-rate) — each with a granularity honesty flag.</a:t>
+              <a:t>Sling CLI, Claude Code sessions (per-token), Anthropic API, Cursor/Copilot (invoice), Max seats (flat-rate) — each with a granularity honesty flag.</a:t>
             </a:r>
             <a:endParaRPr lang="en-US" sz="1180" dirty="0"/>
           </a:p>
@@ -5780,7 +5781,7 @@
         </p:nvSpPr>
         <p:spPr>
           <a:xfrm>
-            <a:off x="5212080" y="2112264"/>
+            <a:off x="5212080" y="1985214"/>
             <a:ext cx="6339535" cy="548640"/>
           </a:xfrm>
           <a:prstGeom prst="rect">
@@ -5822,7 +5823,7 @@
         </p:nvSpPr>
         <p:spPr>
           <a:xfrm>
-            <a:off x="5212080" y="2679192"/>
+            <a:off x="5212080" y="2734056"/>
             <a:ext cx="6339535" cy="320040"/>
           </a:xfrm>
           <a:prstGeom prst="rect">
@@ -5903,7 +5904,7 @@
         </p:nvSpPr>
         <p:spPr>
           <a:xfrm>
-            <a:off x="5212080" y="3575304"/>
+            <a:off x="5212080" y="3726180"/>
             <a:ext cx="6339535" cy="320040"/>
           </a:xfrm>
           <a:prstGeom prst="rect">
@@ -5984,7 +5985,7 @@
         </p:nvSpPr>
         <p:spPr>
           <a:xfrm>
-            <a:off x="5212080" y="4471416"/>
+            <a:off x="5212080" y="4628474"/>
             <a:ext cx="6339535" cy="320040"/>
           </a:xfrm>
           <a:prstGeom prst="rect">
@@ -6051,7 +6052,29 @@
                 <a:ea typeface="Roboto" pitchFamily="34" charset="-122"/>
                 <a:cs typeface="Roboto" pitchFamily="34" charset="-120"/>
               </a:rPr>
-              <a:t>Vendor-neutral; version-controlled next to code; one file serves humans and agents.</a:t>
+              <a:t>Vendor-neutral; </a:t>
+            </a:r>
+            <a:r>
+              <a:rPr lang="en-US" sz="1200" b="1" dirty="0">
+                <a:solidFill>
+                  <a:srgbClr val="000000"/>
+                </a:solidFill>
+                <a:latin typeface="Roboto" pitchFamily="34" charset="0"/>
+                <a:ea typeface="Roboto" pitchFamily="34" charset="-122"/>
+                <a:cs typeface="Roboto" pitchFamily="34" charset="-120"/>
+              </a:rPr>
+              <a:t>version-controlled next to code</a:t>
+            </a:r>
+            <a:r>
+              <a:rPr lang="en-US" sz="1200" dirty="0">
+                <a:solidFill>
+                  <a:srgbClr val="000000"/>
+                </a:solidFill>
+                <a:latin typeface="Roboto" pitchFamily="34" charset="0"/>
+                <a:ea typeface="Roboto" pitchFamily="34" charset="-122"/>
+                <a:cs typeface="Roboto" pitchFamily="34" charset="-120"/>
+              </a:rPr>
+              <a:t>; one file serves humans and agents.</a:t>
             </a:r>
             <a:endParaRPr lang="en-US" sz="1200" dirty="0"/>
           </a:p>
@@ -7036,8 +7059,8 @@
         </p:nvSpPr>
         <p:spPr>
           <a:xfrm>
-            <a:off x="640080" y="5166360"/>
-            <a:ext cx="10911535" cy="868680"/>
+            <a:off x="640081" y="5166360"/>
+            <a:ext cx="10469880" cy="868680"/>
           </a:xfrm>
           <a:prstGeom prst="rect">
             <a:avLst/>
@@ -7064,7 +7087,7 @@
         <p:spPr>
           <a:xfrm>
             <a:off x="914400" y="5166360"/>
-            <a:ext cx="10362895" cy="868680"/>
+            <a:ext cx="10012679" cy="868680"/>
           </a:xfrm>
           <a:prstGeom prst="rect">
             <a:avLst/>
@@ -7091,7 +7114,28 @@
                 <a:ea typeface="Roboto Mono" pitchFamily="34" charset="-122"/>
                 <a:cs typeface="Roboto Mono" pitchFamily="34" charset="-120"/>
               </a:rPr>
-              <a:t>The move:  </a:t>
+              <a:t>The move:</a:t>
+            </a:r>
+            <a:br>
+              <a:rPr lang="en-US" sz="1300" b="1" dirty="0">
+                <a:solidFill>
+                  <a:srgbClr val="FFFFFF"/>
+                </a:solidFill>
+                <a:latin typeface="Roboto Mono" pitchFamily="34" charset="0"/>
+                <a:ea typeface="Roboto Mono" pitchFamily="34" charset="-122"/>
+                <a:cs typeface="Roboto Mono" pitchFamily="34" charset="-120"/>
+              </a:rPr>
+            </a:br>
+            <a:r>
+              <a:rPr lang="en-US" sz="1300" b="1" dirty="0">
+                <a:solidFill>
+                  <a:srgbClr val="FFFFFF"/>
+                </a:solidFill>
+                <a:latin typeface="Roboto Mono" pitchFamily="34" charset="0"/>
+                <a:ea typeface="Roboto Mono" pitchFamily="34" charset="-122"/>
+                <a:cs typeface="Roboto Mono" pitchFamily="34" charset="-120"/>
+              </a:rPr>
+              <a:t>A</a:t>
             </a:r>
             <a:r>
               <a:rPr lang="en-US" sz="1300" dirty="0">
@@ -7102,7 +7146,7 @@
                 <a:ea typeface="Roboto" pitchFamily="34" charset="-122"/>
                 <a:cs typeface="Roboto" pitchFamily="34" charset="-120"/>
               </a:rPr>
-              <a:t>align our frontmatter + folder layout to OKF → project knowledge becomes portable, interoperable, and standardised instead of bespoke.</a:t>
+              <a:t>lign our frontmatter + folder layout to OKF → project knowledge becomes portable, interoperable, and standardised instead of bespoke.</a:t>
             </a:r>
             <a:endParaRPr lang="en-US" sz="1300" dirty="0"/>
           </a:p>
